--- a/docs/decks/evaluate_profiles/.baseline/evaluate_profiles.generated.pptx
+++ b/docs/decks/evaluate_profiles/.baseline/evaluate_profiles.generated.pptx
@@ -2405,6 +2405,126 @@
           </a:p>
         </p:txBody>
       </p:sp>
+      <p:sp>
+        <p:nvSpPr>
+          <p:cNvPr id="13" name="Shape 10"/>
+          <p:cNvSpPr/>
+          <p:nvPr/>
+        </p:nvSpPr>
+        <p:spPr>
+          <a:xfrm>
+            <a:off x="457200" y="3063240"/>
+            <a:ext cx="274320" cy="274320"/>
+          </a:xfrm>
+          <a:prstGeom prst="ellipse">
+            <a:avLst/>
+          </a:prstGeom>
+          <a:solidFill>
+            <a:srgbClr val="1BAF7A"/>
+          </a:solidFill>
+          <a:ln w="12700">
+            <a:solidFill>
+              <a:srgbClr val="1BAF7A"/>
+            </a:solidFill>
+            <a:prstDash val="solid"/>
+          </a:ln>
+        </p:spPr>
+      </p:sp>
+      <p:sp>
+        <p:nvSpPr>
+          <p:cNvPr id="14" name="Text 11"/>
+          <p:cNvSpPr txBox="1"/>
+          <p:nvPr/>
+        </p:nvSpPr>
+        <p:spPr>
+          <a:xfrm>
+            <a:off x="457200" y="3063240"/>
+            <a:ext cx="274320" cy="274320"/>
+          </a:xfrm>
+          <a:prstGeom prst="rect">
+            <a:avLst/>
+          </a:prstGeom>
+          <a:noFill/>
+          <a:ln/>
+        </p:spPr>
+        <p:txBody>
+          <a:bodyPr wrap="square" lIns="0" tIns="0" rIns="0" bIns="0" rtlCol="0" anchor="ctr"/>
+          <a:lstStyle/>
+          <a:p>
+            <a:pPr algn="ctr" indent="0" marL="0">
+              <a:buNone/>
+            </a:pPr>
+            <a:r>
+              <a:rPr lang="en-US" sz="1200" b="1" dirty="0">
+                <a:solidFill>
+                  <a:srgbClr val="FFFFFF"/>
+                </a:solidFill>
+                <a:latin typeface="Calibri" pitchFamily="34" charset="0"/>
+                <a:ea typeface="Calibri" pitchFamily="34" charset="-122"/>
+                <a:cs typeface="Calibri" pitchFamily="34" charset="-120"/>
+              </a:rPr>
+              <a:t>✓</a:t>
+            </a:r>
+            <a:endParaRPr lang="en-US" sz="1200" dirty="0"/>
+          </a:p>
+        </p:txBody>
+      </p:sp>
+      <p:sp>
+        <p:nvSpPr>
+          <p:cNvPr id="15" name="Text 12"/>
+          <p:cNvSpPr txBox="1"/>
+          <p:nvPr/>
+        </p:nvSpPr>
+        <p:spPr>
+          <a:xfrm>
+            <a:off x="841248" y="3017520"/>
+            <a:ext cx="7845552" cy="978408"/>
+          </a:xfrm>
+          <a:prstGeom prst="rect">
+            <a:avLst/>
+          </a:prstGeom>
+          <a:noFill/>
+          <a:ln/>
+        </p:spPr>
+        <p:txBody>
+          <a:bodyPr wrap="square" lIns="0" tIns="0" rIns="0" bIns="0" rtlCol="0" anchor="t"/>
+          <a:lstStyle/>
+          <a:p>
+            <a:pPr indent="0" marL="0">
+              <a:buNone/>
+            </a:pPr>
+            <a:r>
+              <a:rPr lang="en-US" sz="1100" b="1" dirty="0">
+                <a:solidFill>
+                  <a:srgbClr val="1F2329"/>
+                </a:solidFill>
+                <a:latin typeface="Calibri" pitchFamily="34" charset="0"/>
+                <a:ea typeface="Calibri" pitchFamily="34" charset="-122"/>
+                <a:cs typeface="Calibri" pitchFamily="34" charset="-120"/>
+              </a:rPr>
+              <a:t>Efficient keeps corners</a:t>
+            </a:r>
+            <a:endParaRPr lang="en-US" sz="1100" dirty="0"/>
+          </a:p>
+          <a:p>
+            <a:pPr indent="0" marL="0">
+              <a:buNone/>
+            </a:pPr>
+            <a:r>
+              <a:rPr lang="en-US" sz="1100" dirty="0">
+                <a:solidFill>
+                  <a:srgbClr val="52514E"/>
+                </a:solidFill>
+                <a:latin typeface="Calibri" pitchFamily="34" charset="0"/>
+                <a:ea typeface="Calibri" pitchFamily="34" charset="-122"/>
+                <a:cs typeface="Calibri" pitchFamily="34" charset="-120"/>
+              </a:rPr>
+              <a:t>Freeform edges merge only across tangent joints (0.57 deg): a 28 deg corner stays a joint (P12), a tangent joint merges (P13).</a:t>
+            </a:r>
+            <a:endParaRPr lang="en-US" sz="1100" dirty="0"/>
+          </a:p>
+        </p:txBody>
+      </p:sp>
     </p:spTree>
   </p:cSld>
   <p:clrMapOvr>
@@ -8281,7 +8401,7 @@
                           <a:ea typeface="Calibri" pitchFamily="34" charset="-122"/>
                           <a:cs typeface="Calibri" pitchFamily="34" charset="-120"/>
                         </a:rPr>
-                        <a:t>One curve / One per input curve (exact) / Efficient (merges where exact).</a:t>
+                        <a:t>One curve / One per input curve (exact) / Efficient (merges exact lines and arcs; freeform only across tangent joints).</a:t>
                       </a:r>
                       <a:endParaRPr lang="en-US" sz="1050" dirty="0">
                         <a:latin typeface="Calibri" charset="0"/>
